--- a/test-corpus/word-verification/xychart.pptx
+++ b/test-corpus/word-verification/xychart.pptx
@@ -144,8 +144,8 @@
         </p:nvSpPr>
         <p:spPr>
           <a:xfrm>
-            <a:off x="1279424" y="1175212"/>
-            <a:ext cx="9633152" cy="439535"/>
+            <a:off x="457200" y="1860207"/>
+            <a:ext cx="7034784" cy="320979"/>
           </a:xfrm>
           <a:prstGeom prst="rect">
             <a:avLst/>
@@ -168,7 +168,7 @@
               </a:spcAft>
             </a:pPr>
             <a:r>
-              <a:rPr lang="en-US" b="1" sz="1666" dirty="0">
+              <a:rPr lang="en-US" b="1" sz="1200" dirty="0">
                 <a:solidFill>
                   <a:srgbClr val="000000"/>
                 </a:solidFill>
@@ -186,19 +186,19 @@
         </p:nvSpPr>
         <p:spPr>
           <a:xfrm>
-            <a:off x="2170704" y="1614747"/>
-            <a:ext cx="8204662" cy="268605"/>
-          </a:xfrm>
-          <a:prstGeom prst="rect">
-            <a:avLst/>
-          </a:prstGeom>
-          <a:noFill/>
-          <a:ln>
-            <a:noFill/>
-          </a:ln>
-        </p:spPr>
-        <p:txBody>
-          <a:bodyPr wrap="none" lIns="24419" tIns="0" rIns="24419" bIns="0" anchor="ctr"/>
+            <a:off x="1108074" y="2181186"/>
+            <a:ext cx="5991603" cy="196154"/>
+          </a:xfrm>
+          <a:prstGeom prst="rect">
+            <a:avLst/>
+          </a:prstGeom>
+          <a:noFill/>
+          <a:ln>
+            <a:noFill/>
+          </a:ln>
+        </p:spPr>
+        <p:txBody>
+          <a:bodyPr wrap="none" lIns="17832" tIns="0" rIns="17832" bIns="0" anchor="ctr"/>
           <a:lstStyle/>
           <a:p>
             <a:pPr algn="l">
@@ -210,7 +210,7 @@
               </a:spcAft>
             </a:pPr>
             <a:r>
-              <a:rPr lang="en-US" b="1" sz="1282" dirty="0">
+              <a:rPr lang="en-US" b="1" sz="950" dirty="0">
                 <a:solidFill>
                   <a:srgbClr val="000000"/>
                 </a:solidFill>
@@ -228,8 +228,8 @@
         </p:nvSpPr>
         <p:spPr>
           <a:xfrm>
-            <a:off x="2170704" y="5814753"/>
-            <a:ext cx="8204662" cy="1"/>
+            <a:off x="1108074" y="5248316"/>
+            <a:ext cx="5991603" cy="1"/>
           </a:xfrm>
           <a:custGeom>
             <a:avLst/>
@@ -238,18 +238,18 @@
             <a:cxnLst/>
             <a:rect l="0" t="0" r="0" b="0"/>
             <a:pathLst>
-              <a:path w="6400800" h="1" fill="none">
+              <a:path w="5991603" h="1" fill="none">
                 <a:moveTo>
                   <a:pt x="0" y="0"/>
                 </a:moveTo>
                 <a:lnTo>
-                  <a:pt x="6400800" y="0"/>
+                  <a:pt x="5991603" y="0"/>
                 </a:lnTo>
               </a:path>
             </a:pathLst>
           </a:custGeom>
           <a:noFill/>
-          <a:ln w="12209">
+          <a:ln w="8916">
             <a:solidFill>
               <a:srgbClr val="D9D9D9"/>
             </a:solidFill>
@@ -264,19 +264,19 @@
         </p:nvSpPr>
         <p:spPr>
           <a:xfrm>
-            <a:off x="1340471" y="5704869"/>
-            <a:ext cx="732559" cy="219768"/>
-          </a:xfrm>
-          <a:prstGeom prst="rect">
-            <a:avLst/>
-          </a:prstGeom>
-          <a:noFill/>
-          <a:ln>
-            <a:noFill/>
-          </a:ln>
-        </p:spPr>
-        <p:txBody>
-          <a:bodyPr wrap="none" lIns="24419" tIns="0" rIns="24419" bIns="0" anchor="ctr"/>
+            <a:off x="501780" y="5168071"/>
+            <a:ext cx="534965" cy="160489"/>
+          </a:xfrm>
+          <a:prstGeom prst="rect">
+            <a:avLst/>
+          </a:prstGeom>
+          <a:noFill/>
+          <a:ln>
+            <a:noFill/>
+          </a:ln>
+        </p:spPr>
+        <p:txBody>
+          <a:bodyPr wrap="none" lIns="17832" tIns="0" rIns="17832" bIns="0" anchor="ctr"/>
           <a:lstStyle/>
           <a:p>
             <a:pPr algn="r">
@@ -288,7 +288,7 @@
               </a:spcAft>
             </a:pPr>
             <a:r>
-              <a:rPr lang="en-US" sz="1282" dirty="0">
+              <a:rPr lang="en-US" sz="950" dirty="0">
                 <a:solidFill>
                   <a:srgbClr val="000000"/>
                 </a:solidFill>
@@ -306,8 +306,8 @@
         </p:nvSpPr>
         <p:spPr>
           <a:xfrm>
-            <a:off x="2170704" y="4768239"/>
-            <a:ext cx="8204662" cy="1"/>
+            <a:off x="1108074" y="4484081"/>
+            <a:ext cx="5991603" cy="1"/>
           </a:xfrm>
           <a:custGeom>
             <a:avLst/>
@@ -316,18 +316,18 @@
             <a:cxnLst/>
             <a:rect l="0" t="0" r="0" b="0"/>
             <a:pathLst>
-              <a:path w="6400800" h="1" fill="none">
+              <a:path w="5991603" h="1" fill="none">
                 <a:moveTo>
                   <a:pt x="0" y="0"/>
                 </a:moveTo>
                 <a:lnTo>
-                  <a:pt x="6400800" y="0"/>
+                  <a:pt x="5991603" y="0"/>
                 </a:lnTo>
               </a:path>
             </a:pathLst>
           </a:custGeom>
           <a:noFill/>
-          <a:ln w="12209">
+          <a:ln w="8916">
             <a:solidFill>
               <a:srgbClr val="D9D9D9"/>
             </a:solidFill>
@@ -342,19 +342,19 @@
         </p:nvSpPr>
         <p:spPr>
           <a:xfrm>
-            <a:off x="1340471" y="4658355"/>
-            <a:ext cx="732559" cy="219768"/>
-          </a:xfrm>
-          <a:prstGeom prst="rect">
-            <a:avLst/>
-          </a:prstGeom>
-          <a:noFill/>
-          <a:ln>
-            <a:noFill/>
-          </a:ln>
-        </p:spPr>
-        <p:txBody>
-          <a:bodyPr wrap="none" lIns="24419" tIns="0" rIns="24419" bIns="0" anchor="ctr"/>
+            <a:off x="501780" y="4403836"/>
+            <a:ext cx="534965" cy="160489"/>
+          </a:xfrm>
+          <a:prstGeom prst="rect">
+            <a:avLst/>
+          </a:prstGeom>
+          <a:noFill/>
+          <a:ln>
+            <a:noFill/>
+          </a:ln>
+        </p:spPr>
+        <p:txBody>
+          <a:bodyPr wrap="none" lIns="17832" tIns="0" rIns="17832" bIns="0" anchor="ctr"/>
           <a:lstStyle/>
           <a:p>
             <a:pPr algn="r">
@@ -366,7 +366,7 @@
               </a:spcAft>
             </a:pPr>
             <a:r>
-              <a:rPr lang="en-US" sz="1282" dirty="0">
+              <a:rPr lang="en-US" sz="950" dirty="0">
                 <a:solidFill>
                   <a:srgbClr val="000000"/>
                 </a:solidFill>
@@ -384,8 +384,8 @@
         </p:nvSpPr>
         <p:spPr>
           <a:xfrm>
-            <a:off x="2170704" y="3721727"/>
-            <a:ext cx="8204662" cy="1"/>
+            <a:off x="1108074" y="3719846"/>
+            <a:ext cx="5991603" cy="1"/>
           </a:xfrm>
           <a:custGeom>
             <a:avLst/>
@@ -394,18 +394,18 @@
             <a:cxnLst/>
             <a:rect l="0" t="0" r="0" b="0"/>
             <a:pathLst>
-              <a:path w="6400800" h="1" fill="none">
+              <a:path w="5991603" h="1" fill="none">
                 <a:moveTo>
                   <a:pt x="0" y="0"/>
                 </a:moveTo>
                 <a:lnTo>
-                  <a:pt x="6400800" y="0"/>
+                  <a:pt x="5991603" y="0"/>
                 </a:lnTo>
               </a:path>
             </a:pathLst>
           </a:custGeom>
           <a:noFill/>
-          <a:ln w="12209">
+          <a:ln w="8916">
             <a:solidFill>
               <a:srgbClr val="D9D9D9"/>
             </a:solidFill>
@@ -420,19 +420,19 @@
         </p:nvSpPr>
         <p:spPr>
           <a:xfrm>
-            <a:off x="1340471" y="3611843"/>
-            <a:ext cx="732559" cy="219768"/>
-          </a:xfrm>
-          <a:prstGeom prst="rect">
-            <a:avLst/>
-          </a:prstGeom>
-          <a:noFill/>
-          <a:ln>
-            <a:noFill/>
-          </a:ln>
-        </p:spPr>
-        <p:txBody>
-          <a:bodyPr wrap="none" lIns="24419" tIns="0" rIns="24419" bIns="0" anchor="ctr"/>
+            <a:off x="501780" y="3639601"/>
+            <a:ext cx="534965" cy="160489"/>
+          </a:xfrm>
+          <a:prstGeom prst="rect">
+            <a:avLst/>
+          </a:prstGeom>
+          <a:noFill/>
+          <a:ln>
+            <a:noFill/>
+          </a:ln>
+        </p:spPr>
+        <p:txBody>
+          <a:bodyPr wrap="none" lIns="17832" tIns="0" rIns="17832" bIns="0" anchor="ctr"/>
           <a:lstStyle/>
           <a:p>
             <a:pPr algn="r">
@@ -444,7 +444,7 @@
               </a:spcAft>
             </a:pPr>
             <a:r>
-              <a:rPr lang="en-US" sz="1282" dirty="0">
+              <a:rPr lang="en-US" sz="950" dirty="0">
                 <a:solidFill>
                   <a:srgbClr val="000000"/>
                 </a:solidFill>
@@ -462,8 +462,8 @@
         </p:nvSpPr>
         <p:spPr>
           <a:xfrm>
-            <a:off x="2170704" y="2675213"/>
-            <a:ext cx="8204662" cy="1"/>
+            <a:off x="1108074" y="2955611"/>
+            <a:ext cx="5991603" cy="1"/>
           </a:xfrm>
           <a:custGeom>
             <a:avLst/>
@@ -472,18 +472,18 @@
             <a:cxnLst/>
             <a:rect l="0" t="0" r="0" b="0"/>
             <a:pathLst>
-              <a:path w="6400800" h="1" fill="none">
+              <a:path w="5991603" h="1" fill="none">
                 <a:moveTo>
                   <a:pt x="0" y="0"/>
                 </a:moveTo>
                 <a:lnTo>
-                  <a:pt x="6400800" y="0"/>
+                  <a:pt x="5991603" y="0"/>
                 </a:lnTo>
               </a:path>
             </a:pathLst>
           </a:custGeom>
           <a:noFill/>
-          <a:ln w="12209">
+          <a:ln w="8916">
             <a:solidFill>
               <a:srgbClr val="D9D9D9"/>
             </a:solidFill>
@@ -498,19 +498,19 @@
         </p:nvSpPr>
         <p:spPr>
           <a:xfrm>
-            <a:off x="1340471" y="2565330"/>
-            <a:ext cx="732559" cy="219768"/>
-          </a:xfrm>
-          <a:prstGeom prst="rect">
-            <a:avLst/>
-          </a:prstGeom>
-          <a:noFill/>
-          <a:ln>
-            <a:noFill/>
-          </a:ln>
-        </p:spPr>
-        <p:txBody>
-          <a:bodyPr wrap="none" lIns="24419" tIns="0" rIns="24419" bIns="0" anchor="ctr"/>
+            <a:off x="501780" y="2875366"/>
+            <a:ext cx="534965" cy="160489"/>
+          </a:xfrm>
+          <a:prstGeom prst="rect">
+            <a:avLst/>
+          </a:prstGeom>
+          <a:noFill/>
+          <a:ln>
+            <a:noFill/>
+          </a:ln>
+        </p:spPr>
+        <p:txBody>
+          <a:bodyPr wrap="none" lIns="17832" tIns="0" rIns="17832" bIns="0" anchor="ctr"/>
           <a:lstStyle/>
           <a:p>
             <a:pPr algn="r">
@@ -522,7 +522,7 @@
               </a:spcAft>
             </a:pPr>
             <a:r>
-              <a:rPr lang="en-US" sz="1282" dirty="0">
+              <a:rPr lang="en-US" sz="950" dirty="0">
                 <a:solidFill>
                   <a:srgbClr val="000000"/>
                 </a:solidFill>
@@ -540,8 +540,8 @@
         </p:nvSpPr>
         <p:spPr>
           <a:xfrm>
-            <a:off x="2170704" y="5863590"/>
-            <a:ext cx="683722" cy="219768"/>
+            <a:off x="1108074" y="5283980"/>
+            <a:ext cx="499300" cy="160489"/>
           </a:xfrm>
           <a:prstGeom prst="rect">
             <a:avLst/>
@@ -564,7 +564,7 @@
               </a:spcAft>
             </a:pPr>
             <a:r>
-              <a:rPr lang="en-US" sz="1282" dirty="0">
+              <a:rPr lang="en-US" sz="950" dirty="0">
                 <a:solidFill>
                   <a:srgbClr val="000000"/>
                 </a:solidFill>
@@ -582,8 +582,8 @@
         </p:nvSpPr>
         <p:spPr>
           <a:xfrm>
-            <a:off x="2854426" y="5863590"/>
-            <a:ext cx="683722" cy="219768"/>
+            <a:off x="1607374" y="5283980"/>
+            <a:ext cx="499300" cy="160489"/>
           </a:xfrm>
           <a:prstGeom prst="rect">
             <a:avLst/>
@@ -606,7 +606,7 @@
               </a:spcAft>
             </a:pPr>
             <a:r>
-              <a:rPr lang="en-US" sz="1282" dirty="0">
+              <a:rPr lang="en-US" sz="950" dirty="0">
                 <a:solidFill>
                   <a:srgbClr val="000000"/>
                 </a:solidFill>
@@ -624,8 +624,8 @@
         </p:nvSpPr>
         <p:spPr>
           <a:xfrm>
-            <a:off x="3538148" y="5863590"/>
-            <a:ext cx="683722" cy="219768"/>
+            <a:off x="2106674" y="5283980"/>
+            <a:ext cx="499300" cy="160489"/>
           </a:xfrm>
           <a:prstGeom prst="rect">
             <a:avLst/>
@@ -648,7 +648,7 @@
               </a:spcAft>
             </a:pPr>
             <a:r>
-              <a:rPr lang="en-US" sz="1282" dirty="0">
+              <a:rPr lang="en-US" sz="950" dirty="0">
                 <a:solidFill>
                   <a:srgbClr val="000000"/>
                 </a:solidFill>
@@ -666,8 +666,8 @@
         </p:nvSpPr>
         <p:spPr>
           <a:xfrm>
-            <a:off x="4221870" y="5863590"/>
-            <a:ext cx="683722" cy="219768"/>
+            <a:off x="2605974" y="5283980"/>
+            <a:ext cx="499300" cy="160489"/>
           </a:xfrm>
           <a:prstGeom prst="rect">
             <a:avLst/>
@@ -690,7 +690,7 @@
               </a:spcAft>
             </a:pPr>
             <a:r>
-              <a:rPr lang="en-US" sz="1282" dirty="0">
+              <a:rPr lang="en-US" sz="950" dirty="0">
                 <a:solidFill>
                   <a:srgbClr val="000000"/>
                 </a:solidFill>
@@ -708,8 +708,8 @@
         </p:nvSpPr>
         <p:spPr>
           <a:xfrm>
-            <a:off x="4905591" y="5863590"/>
-            <a:ext cx="683722" cy="219768"/>
+            <a:off x="3105275" y="5283980"/>
+            <a:ext cx="499300" cy="160489"/>
           </a:xfrm>
           <a:prstGeom prst="rect">
             <a:avLst/>
@@ -732,7 +732,7 @@
               </a:spcAft>
             </a:pPr>
             <a:r>
-              <a:rPr lang="en-US" sz="1282" dirty="0">
+              <a:rPr lang="en-US" sz="950" dirty="0">
                 <a:solidFill>
                   <a:srgbClr val="000000"/>
                 </a:solidFill>
@@ -750,8 +750,8 @@
         </p:nvSpPr>
         <p:spPr>
           <a:xfrm>
-            <a:off x="5589313" y="5863590"/>
-            <a:ext cx="683722" cy="219768"/>
+            <a:off x="3604575" y="5283980"/>
+            <a:ext cx="499300" cy="160489"/>
           </a:xfrm>
           <a:prstGeom prst="rect">
             <a:avLst/>
@@ -774,7 +774,7 @@
               </a:spcAft>
             </a:pPr>
             <a:r>
-              <a:rPr lang="en-US" sz="1282" dirty="0">
+              <a:rPr lang="en-US" sz="950" dirty="0">
                 <a:solidFill>
                   <a:srgbClr val="000000"/>
                 </a:solidFill>
@@ -792,8 +792,8 @@
         </p:nvSpPr>
         <p:spPr>
           <a:xfrm>
-            <a:off x="6273035" y="5863590"/>
-            <a:ext cx="683722" cy="219768"/>
+            <a:off x="4103875" y="5283980"/>
+            <a:ext cx="499300" cy="160489"/>
           </a:xfrm>
           <a:prstGeom prst="rect">
             <a:avLst/>
@@ -816,7 +816,7 @@
               </a:spcAft>
             </a:pPr>
             <a:r>
-              <a:rPr lang="en-US" sz="1282" dirty="0">
+              <a:rPr lang="en-US" sz="950" dirty="0">
                 <a:solidFill>
                   <a:srgbClr val="000000"/>
                 </a:solidFill>
@@ -834,8 +834,8 @@
         </p:nvSpPr>
         <p:spPr>
           <a:xfrm>
-            <a:off x="6956757" y="5863590"/>
-            <a:ext cx="683722" cy="219768"/>
+            <a:off x="4603175" y="5283980"/>
+            <a:ext cx="499300" cy="160489"/>
           </a:xfrm>
           <a:prstGeom prst="rect">
             <a:avLst/>
@@ -858,7 +858,7 @@
               </a:spcAft>
             </a:pPr>
             <a:r>
-              <a:rPr lang="en-US" sz="1282" dirty="0">
+              <a:rPr lang="en-US" sz="950" dirty="0">
                 <a:solidFill>
                   <a:srgbClr val="000000"/>
                 </a:solidFill>
@@ -876,8 +876,8 @@
         </p:nvSpPr>
         <p:spPr>
           <a:xfrm>
-            <a:off x="7640479" y="5863590"/>
-            <a:ext cx="683722" cy="219768"/>
+            <a:off x="5102476" y="5283980"/>
+            <a:ext cx="499300" cy="160489"/>
           </a:xfrm>
           <a:prstGeom prst="rect">
             <a:avLst/>
@@ -900,7 +900,7 @@
               </a:spcAft>
             </a:pPr>
             <a:r>
-              <a:rPr lang="en-US" sz="1282" dirty="0">
+              <a:rPr lang="en-US" sz="950" dirty="0">
                 <a:solidFill>
                   <a:srgbClr val="000000"/>
                 </a:solidFill>
@@ -918,8 +918,8 @@
         </p:nvSpPr>
         <p:spPr>
           <a:xfrm>
-            <a:off x="8324201" y="5863590"/>
-            <a:ext cx="683722" cy="219768"/>
+            <a:off x="5601776" y="5283980"/>
+            <a:ext cx="499300" cy="160489"/>
           </a:xfrm>
           <a:prstGeom prst="rect">
             <a:avLst/>
@@ -942,7 +942,7 @@
               </a:spcAft>
             </a:pPr>
             <a:r>
-              <a:rPr lang="en-US" sz="1282" dirty="0">
+              <a:rPr lang="en-US" sz="950" dirty="0">
                 <a:solidFill>
                   <a:srgbClr val="000000"/>
                 </a:solidFill>
@@ -960,8 +960,8 @@
         </p:nvSpPr>
         <p:spPr>
           <a:xfrm>
-            <a:off x="9007922" y="5863590"/>
-            <a:ext cx="683722" cy="219768"/>
+            <a:off x="6101076" y="5283980"/>
+            <a:ext cx="499300" cy="160489"/>
           </a:xfrm>
           <a:prstGeom prst="rect">
             <a:avLst/>
@@ -984,7 +984,7 @@
               </a:spcAft>
             </a:pPr>
             <a:r>
-              <a:rPr lang="en-US" sz="1282" dirty="0">
+              <a:rPr lang="en-US" sz="950" dirty="0">
                 <a:solidFill>
                   <a:srgbClr val="000000"/>
                 </a:solidFill>
@@ -1002,8 +1002,8 @@
         </p:nvSpPr>
         <p:spPr>
           <a:xfrm>
-            <a:off x="9691644" y="5863590"/>
-            <a:ext cx="683722" cy="219768"/>
+            <a:off x="6600376" y="5283980"/>
+            <a:ext cx="499300" cy="160489"/>
           </a:xfrm>
           <a:prstGeom prst="rect">
             <a:avLst/>
@@ -1026,7 +1026,7 @@
               </a:spcAft>
             </a:pPr>
             <a:r>
-              <a:rPr lang="en-US" sz="1282" dirty="0">
+              <a:rPr lang="en-US" sz="950" dirty="0">
                 <a:solidFill>
                   <a:srgbClr val="000000"/>
                 </a:solidFill>
@@ -1044,8 +1044,8 @@
         </p:nvSpPr>
         <p:spPr>
           <a:xfrm>
-            <a:off x="2273262" y="5291497"/>
-            <a:ext cx="478605" cy="523256"/>
+            <a:off x="1182969" y="4866198"/>
+            <a:ext cx="349510" cy="382118"/>
           </a:xfrm>
           <a:prstGeom prst="rect">
             <a:avLst/>
@@ -1066,8 +1066,8 @@
         </p:nvSpPr>
         <p:spPr>
           <a:xfrm>
-            <a:off x="2956984" y="4768239"/>
-            <a:ext cx="478605" cy="1046514"/>
+            <a:off x="1682269" y="4484081"/>
+            <a:ext cx="349510" cy="764235"/>
           </a:xfrm>
           <a:prstGeom prst="rect">
             <a:avLst/>
@@ -1088,8 +1088,8 @@
         </p:nvSpPr>
         <p:spPr>
           <a:xfrm>
-            <a:off x="3640706" y="3983355"/>
-            <a:ext cx="478605" cy="1831398"/>
+            <a:off x="2181569" y="3910904"/>
+            <a:ext cx="349510" cy="1337411"/>
           </a:xfrm>
           <a:prstGeom prst="rect">
             <a:avLst/>
@@ -1110,8 +1110,8 @@
         </p:nvSpPr>
         <p:spPr>
           <a:xfrm>
-            <a:off x="4324428" y="3617075"/>
-            <a:ext cx="478605" cy="2197677"/>
+            <a:off x="2680869" y="3643422"/>
+            <a:ext cx="349510" cy="1604894"/>
           </a:xfrm>
           <a:prstGeom prst="rect">
             <a:avLst/>
@@ -1132,8 +1132,8 @@
         </p:nvSpPr>
         <p:spPr>
           <a:xfrm>
-            <a:off x="5008150" y="2936841"/>
-            <a:ext cx="478605" cy="2877911"/>
+            <a:off x="3180170" y="3146669"/>
+            <a:ext cx="349510" cy="2101646"/>
           </a:xfrm>
           <a:prstGeom prst="rect">
             <a:avLst/>
@@ -1154,8 +1154,8 @@
         </p:nvSpPr>
         <p:spPr>
           <a:xfrm>
-            <a:off x="5691872" y="2413585"/>
-            <a:ext cx="478605" cy="3401167"/>
+            <a:off x="3679470" y="2764552"/>
+            <a:ext cx="349510" cy="2483764"/>
           </a:xfrm>
           <a:prstGeom prst="rect">
             <a:avLst/>
@@ -1176,8 +1176,8 @@
         </p:nvSpPr>
         <p:spPr>
           <a:xfrm>
-            <a:off x="6375593" y="2151957"/>
-            <a:ext cx="478605" cy="3662795"/>
+            <a:off x="4178770" y="2573493"/>
+            <a:ext cx="349510" cy="2674823"/>
           </a:xfrm>
           <a:prstGeom prst="rect">
             <a:avLst/>
@@ -1198,8 +1198,8 @@
         </p:nvSpPr>
         <p:spPr>
           <a:xfrm>
-            <a:off x="7059315" y="2570562"/>
-            <a:ext cx="478605" cy="3244191"/>
+            <a:off x="4678070" y="2879187"/>
+            <a:ext cx="349510" cy="2369129"/>
           </a:xfrm>
           <a:prstGeom prst="rect">
             <a:avLst/>
@@ -1220,8 +1220,8 @@
         </p:nvSpPr>
         <p:spPr>
           <a:xfrm>
-            <a:off x="7743037" y="3093819"/>
-            <a:ext cx="478605" cy="2720933"/>
+            <a:off x="5177371" y="3261305"/>
+            <a:ext cx="349510" cy="1987011"/>
           </a:xfrm>
           <a:prstGeom prst="rect">
             <a:avLst/>
@@ -1242,8 +1242,8 @@
         </p:nvSpPr>
         <p:spPr>
           <a:xfrm>
-            <a:off x="8426759" y="3460099"/>
-            <a:ext cx="478605" cy="2354654"/>
+            <a:off x="5676671" y="3528787"/>
+            <a:ext cx="349510" cy="1719529"/>
           </a:xfrm>
           <a:prstGeom prst="rect">
             <a:avLst/>
@@ -1264,8 +1264,8 @@
         </p:nvSpPr>
         <p:spPr>
           <a:xfrm>
-            <a:off x="9110481" y="4244983"/>
-            <a:ext cx="478605" cy="1569770"/>
+            <a:off x="6175971" y="4101963"/>
+            <a:ext cx="349510" cy="1146353"/>
           </a:xfrm>
           <a:prstGeom prst="rect">
             <a:avLst/>
@@ -1286,8 +1286,8 @@
         </p:nvSpPr>
         <p:spPr>
           <a:xfrm>
-            <a:off x="9794202" y="4768239"/>
-            <a:ext cx="478605" cy="1046514"/>
+            <a:off x="6675271" y="4484081"/>
+            <a:ext cx="349510" cy="764235"/>
           </a:xfrm>
           <a:prstGeom prst="rect">
             <a:avLst/>
@@ -1308,8 +1308,8 @@
         </p:nvSpPr>
         <p:spPr>
           <a:xfrm>
-            <a:off x="2512565" y="2151957"/>
-            <a:ext cx="7520940" cy="3139539"/>
+            <a:off x="1357724" y="2573493"/>
+            <a:ext cx="5492303" cy="2292705"/>
           </a:xfrm>
           <a:custGeom>
             <a:avLst/>
@@ -1318,48 +1318,48 @@
             <a:cxnLst/>
             <a:rect l="0" t="0" r="0" b="0"/>
             <a:pathLst>
-              <a:path w="5867400" h="2449286" fill="none">
+              <a:path w="5492303" h="2292705" fill="none">
                 <a:moveTo>
-                  <a:pt x="0" y="2449286"/>
+                  <a:pt x="0" y="2292705"/>
                 </a:moveTo>
                 <a:lnTo>
-                  <a:pt x="533400" y="2041071"/>
+                  <a:pt x="499300" y="1910588"/>
                 </a:lnTo>
                 <a:lnTo>
-                  <a:pt x="1066800" y="1428750"/>
+                  <a:pt x="998600" y="1337411"/>
                 </a:lnTo>
                 <a:lnTo>
-                  <a:pt x="1600200" y="1143000"/>
+                  <a:pt x="1497900" y="1069929"/>
                 </a:lnTo>
                 <a:lnTo>
-                  <a:pt x="2133600" y="612321"/>
+                  <a:pt x="1997201" y="573176"/>
                 </a:lnTo>
                 <a:lnTo>
-                  <a:pt x="2667000" y="204107"/>
+                  <a:pt x="2496501" y="191059"/>
                 </a:lnTo>
                 <a:lnTo>
-                  <a:pt x="3200400" y="0"/>
+                  <a:pt x="2995801" y="0"/>
                 </a:lnTo>
                 <a:lnTo>
-                  <a:pt x="3733800" y="326571"/>
+                  <a:pt x="3495101" y="305694"/>
                 </a:lnTo>
                 <a:lnTo>
-                  <a:pt x="4267200" y="734786"/>
+                  <a:pt x="3994402" y="687812"/>
                 </a:lnTo>
                 <a:lnTo>
-                  <a:pt x="4800600" y="1020536"/>
+                  <a:pt x="4493702" y="955294"/>
                 </a:lnTo>
                 <a:lnTo>
-                  <a:pt x="5334000" y="1632857"/>
+                  <a:pt x="4993002" y="1528470"/>
                 </a:lnTo>
                 <a:lnTo>
-                  <a:pt x="5867400" y="2041071"/>
+                  <a:pt x="5492303" y="1910588"/>
                 </a:lnTo>
               </a:path>
             </a:pathLst>
           </a:custGeom>
           <a:noFill/>
-          <a:ln w="36628">
+          <a:ln w="26748">
             <a:solidFill>
               <a:srgbClr val="ED7D31"/>
             </a:solidFill>
@@ -1374,8 +1374,8 @@
         </p:nvSpPr>
         <p:spPr>
           <a:xfrm>
-            <a:off x="2475937" y="5254869"/>
-            <a:ext cx="73256" cy="73256"/>
+            <a:off x="1330975" y="4839450"/>
+            <a:ext cx="53496" cy="53496"/>
           </a:xfrm>
           <a:prstGeom prst="rect">
             <a:avLst/>
@@ -1396,8 +1396,8 @@
         </p:nvSpPr>
         <p:spPr>
           <a:xfrm>
-            <a:off x="3159659" y="4731611"/>
-            <a:ext cx="73256" cy="73256"/>
+            <a:off x="1830276" y="4457332"/>
+            <a:ext cx="53496" cy="53496"/>
           </a:xfrm>
           <a:prstGeom prst="rect">
             <a:avLst/>
@@ -1418,8 +1418,8 @@
         </p:nvSpPr>
         <p:spPr>
           <a:xfrm>
-            <a:off x="3843381" y="3946727"/>
-            <a:ext cx="73256" cy="73256"/>
+            <a:off x="2329576" y="3884156"/>
+            <a:ext cx="53496" cy="53496"/>
           </a:xfrm>
           <a:prstGeom prst="rect">
             <a:avLst/>
@@ -1440,8 +1440,8 @@
         </p:nvSpPr>
         <p:spPr>
           <a:xfrm>
-            <a:off x="4527103" y="3580448"/>
-            <a:ext cx="73256" cy="73256"/>
+            <a:off x="2828876" y="3616674"/>
+            <a:ext cx="53496" cy="53496"/>
           </a:xfrm>
           <a:prstGeom prst="rect">
             <a:avLst/>
@@ -1462,8 +1462,8 @@
         </p:nvSpPr>
         <p:spPr>
           <a:xfrm>
-            <a:off x="5210824" y="2900214"/>
-            <a:ext cx="73256" cy="73256"/>
+            <a:off x="3328176" y="3119921"/>
+            <a:ext cx="53496" cy="53496"/>
           </a:xfrm>
           <a:prstGeom prst="rect">
             <a:avLst/>
@@ -1484,8 +1484,8 @@
         </p:nvSpPr>
         <p:spPr>
           <a:xfrm>
-            <a:off x="5894546" y="2376957"/>
-            <a:ext cx="73256" cy="73256"/>
+            <a:off x="3827477" y="2737804"/>
+            <a:ext cx="53496" cy="53496"/>
           </a:xfrm>
           <a:prstGeom prst="rect">
             <a:avLst/>
@@ -1506,8 +1506,8 @@
         </p:nvSpPr>
         <p:spPr>
           <a:xfrm>
-            <a:off x="6578268" y="2115329"/>
-            <a:ext cx="73256" cy="73256"/>
+            <a:off x="4326777" y="2546745"/>
+            <a:ext cx="53496" cy="53496"/>
           </a:xfrm>
           <a:prstGeom prst="rect">
             <a:avLst/>
@@ -1528,8 +1528,8 @@
         </p:nvSpPr>
         <p:spPr>
           <a:xfrm>
-            <a:off x="7261990" y="2533934"/>
-            <a:ext cx="73256" cy="73256"/>
+            <a:off x="4826077" y="2852439"/>
+            <a:ext cx="53496" cy="53496"/>
           </a:xfrm>
           <a:prstGeom prst="rect">
             <a:avLst/>
@@ -1550,8 +1550,8 @@
         </p:nvSpPr>
         <p:spPr>
           <a:xfrm>
-            <a:off x="7945712" y="3057191"/>
-            <a:ext cx="73256" cy="73256"/>
+            <a:off x="5325378" y="3234556"/>
+            <a:ext cx="53496" cy="53496"/>
           </a:xfrm>
           <a:prstGeom prst="rect">
             <a:avLst/>
@@ -1572,8 +1572,8 @@
         </p:nvSpPr>
         <p:spPr>
           <a:xfrm>
-            <a:off x="8629434" y="3423471"/>
-            <a:ext cx="73256" cy="73256"/>
+            <a:off x="5824678" y="3502039"/>
+            <a:ext cx="53496" cy="53496"/>
           </a:xfrm>
           <a:prstGeom prst="rect">
             <a:avLst/>
@@ -1594,8 +1594,8 @@
         </p:nvSpPr>
         <p:spPr>
           <a:xfrm>
-            <a:off x="9313155" y="4208355"/>
-            <a:ext cx="73256" cy="73256"/>
+            <a:off x="6323978" y="4075215"/>
+            <a:ext cx="53496" cy="53496"/>
           </a:xfrm>
           <a:prstGeom prst="rect">
             <a:avLst/>
@@ -1616,8 +1616,8 @@
         </p:nvSpPr>
         <p:spPr>
           <a:xfrm>
-            <a:off x="9996877" y="4731611"/>
-            <a:ext cx="73256" cy="73256"/>
+            <a:off x="6823278" y="4457332"/>
+            <a:ext cx="53496" cy="53496"/>
           </a:xfrm>
           <a:prstGeom prst="rect">
             <a:avLst/>
@@ -1638,8 +1638,8 @@
         </p:nvSpPr>
         <p:spPr>
           <a:xfrm>
-            <a:off x="2170704" y="5814753"/>
-            <a:ext cx="8204662" cy="1"/>
+            <a:off x="1108074" y="5248316"/>
+            <a:ext cx="5991603" cy="1"/>
           </a:xfrm>
           <a:custGeom>
             <a:avLst/>
@@ -1648,23 +1648,131 @@
             <a:cxnLst/>
             <a:rect l="0" t="0" r="0" b="0"/>
             <a:pathLst>
-              <a:path w="6400800" h="1" fill="none">
+              <a:path w="5991603" h="1" fill="none">
                 <a:moveTo>
                   <a:pt x="0" y="0"/>
                 </a:moveTo>
                 <a:lnTo>
-                  <a:pt x="6400800" y="0"/>
+                  <a:pt x="5991603" y="0"/>
                 </a:lnTo>
               </a:path>
             </a:pathLst>
           </a:custGeom>
           <a:noFill/>
-          <a:ln w="36628">
+          <a:ln w="26748">
             <a:solidFill>
               <a:srgbClr val="595959"/>
             </a:solidFill>
           </a:ln>
         </p:spPr>
+      </p:sp>
+      <p:sp>
+        <p:nvSpPr>
+          <p:cNvPr id="4" name="Mermaid source"/>
+          <p:cNvSpPr/>
+          <p:nvPr/>
+        </p:nvSpPr>
+        <p:spPr>
+          <a:xfrm>
+            <a:off x="7674864" y="1028700"/>
+            <a:ext cx="4059936" cy="5372100"/>
+          </a:xfrm>
+          <a:prstGeom prst="rect">
+            <a:avLst/>
+          </a:prstGeom>
+          <a:solidFill>
+            <a:srgbClr val="F3F4F6"/>
+          </a:solidFill>
+          <a:ln w="9525">
+            <a:solidFill>
+              <a:srgbClr val="D1D5DB"/>
+            </a:solidFill>
+          </a:ln>
+        </p:spPr>
+        <p:txBody>
+          <a:bodyPr wrap="square" lIns="91440" tIns="45720" rIns="91440" bIns="45720" anchor="t">
+            <a:noAutofit/>
+          </a:bodyPr>
+          <a:lstStyle/>
+          <a:p>
+            <a:pPr algn="l"/>
+            <a:r>
+              <a:rPr lang="en-US" sz="1400" dirty="0">
+                <a:solidFill>
+                  <a:srgbClr val="1F2937"/>
+                </a:solidFill>
+                <a:latin typeface="Consolas"/>
+                <a:cs typeface="Consolas"/>
+              </a:rPr>
+              <a:t>xychart-beta</a:t>
+            </a:r>
+          </a:p>
+          <a:p>
+            <a:pPr algn="l"/>
+            <a:r>
+              <a:rPr lang="en-US" sz="1400" dirty="0">
+                <a:solidFill>
+                  <a:srgbClr val="1F2937"/>
+                </a:solidFill>
+                <a:latin typeface="Consolas"/>
+                <a:cs typeface="Consolas"/>
+              </a:rPr>
+              <a:t>    title "Sales Revenue"</a:t>
+            </a:r>
+          </a:p>
+          <a:p>
+            <a:pPr algn="l"/>
+            <a:r>
+              <a:rPr lang="en-US" sz="1400" dirty="0">
+                <a:solidFill>
+                  <a:srgbClr val="1F2937"/>
+                </a:solidFill>
+                <a:latin typeface="Consolas"/>
+                <a:cs typeface="Consolas"/>
+              </a:rPr>
+              <a:t>    x-axis [jan, feb, mar, apr, may, jun, jul, aug, sep, oct, nov, dec]</a:t>
+            </a:r>
+          </a:p>
+          <a:p>
+            <a:pPr algn="l"/>
+            <a:r>
+              <a:rPr lang="en-US" sz="1400" dirty="0">
+                <a:solidFill>
+                  <a:srgbClr val="1F2937"/>
+                </a:solidFill>
+                <a:latin typeface="Consolas"/>
+                <a:cs typeface="Consolas"/>
+              </a:rPr>
+              <a:t>    y-axis "Revenue (in $)" 4000 --&gt; 11000</a:t>
+            </a:r>
+          </a:p>
+          <a:p>
+            <a:pPr algn="l"/>
+            <a:r>
+              <a:rPr lang="en-US" sz="1400" dirty="0">
+                <a:solidFill>
+                  <a:srgbClr val="1F2937"/>
+                </a:solidFill>
+                <a:latin typeface="Consolas"/>
+                <a:cs typeface="Consolas"/>
+              </a:rPr>
+              <a:t>    bar [5000, 6000, 7500, 8200, 9500, 10500, 11000, 10200, 9200, 8500, 7000, 6000]</a:t>
+            </a:r>
+          </a:p>
+          <a:p>
+            <a:pPr algn="l"/>
+            <a:r>
+              <a:rPr lang="en-US" sz="1400" dirty="0">
+                <a:solidFill>
+                  <a:srgbClr val="1F2937"/>
+                </a:solidFill>
+                <a:latin typeface="Consolas"/>
+                <a:cs typeface="Consolas"/>
+              </a:rPr>
+              <a:t>    line [5000, 6000, 7500, 8200, 9500, 10500, 11000, 10200, 9200, 8500, 7000, 6000]</a:t>
+            </a:r>
+          </a:p>
+        </p:txBody>
       </p:sp>
     </p:spTree>
   </p:cSld>
